--- a/docs/お絵かきハロウィン-企画書.pptx
+++ b/docs/お絵かきハロウィン-企画書.pptx
@@ -1856,7 +1856,7 @@
       </p:grpSpPr>
       <p:pic>
         <p:nvPicPr>
-          <p:cNvPr id="2" name="Image 0" descr="/home/user/PaintingsAquarium/docs/images/画面-ハロウィン-開発中.jpg">    </p:cNvPr>
+          <p:cNvPr id="2" name="Image 0" descr="/home/user/PaintingsAquarium/docs/images/画面-ハロウィン.jpg">    </p:cNvPr>
           <p:cNvPicPr>
             <a:picLocks noChangeAspect="1"/>
           </p:cNvPicPr>
@@ -6504,7 +6504,7 @@
       </p:sp>
       <p:pic>
         <p:nvPicPr>
-          <p:cNvPr id="16" name="Image 0" descr="/home/user/PaintingsAquarium/docs/images/画面-ハロウィン-開発中.jpg">    </p:cNvPr>
+          <p:cNvPr id="16" name="Image 0" descr="/home/user/PaintingsAquarium/docs/images/画面-ハロウィン.jpg">    </p:cNvPr>
           <p:cNvPicPr>
             <a:picLocks noChangeAspect="1"/>
           </p:cNvPicPr>
@@ -6991,7 +6991,7 @@
       </p:sp>
       <p:pic>
         <p:nvPicPr>
-          <p:cNvPr id="6" name="Image 1" descr="/home/user/PaintingsAquarium/docs/images/画面-ハロウィン-開発中.jpg">    </p:cNvPr>
+          <p:cNvPr id="6" name="Image 1" descr="/home/user/PaintingsAquarium/docs/images/画面-ハロウィン.jpg">    </p:cNvPr>
           <p:cNvPicPr>
             <a:picLocks noChangeAspect="1"/>
           </p:cNvPicPr>
@@ -7375,8 +7375,8 @@
         </p:blipFill>
         <p:spPr>
           <a:xfrm>
-            <a:off x="658368" y="1536192"/>
-            <a:ext cx="10874959" cy="2157984"/>
+            <a:off x="658368" y="1517904"/>
+            <a:ext cx="10874959" cy="1078992"/>
           </a:xfrm>
           <a:prstGeom prst="rect">
             <a:avLst/>
@@ -7390,15 +7390,46 @@
           </a:effectLst>
         </p:spPr>
       </p:pic>
-      <p:sp>
-        <p:nvSpPr>
-          <p:cNvPr id="5" name="Shape 2"/>
-          <p:cNvSpPr/>
-          <p:nvPr/>
-        </p:nvSpPr>
-        <p:spPr>
-          <a:xfrm>
-            <a:off x="658368" y="3931920"/>
+      <p:pic>
+        <p:nvPicPr>
+          <p:cNvPr id="5" name="Image 1" descr="/home/user/PaintingsAquarium/docs/images/ハロウィン-塗った例.jpg">    </p:cNvPr>
+          <p:cNvPicPr>
+            <a:picLocks noChangeAspect="1"/>
+          </p:cNvPicPr>
+          <p:nvPr/>
+        </p:nvPicPr>
+        <p:blipFill>
+          <a:blip r:embed="rId2"/>
+          <a:stretch>
+            <a:fillRect/>
+          </a:stretch>
+        </p:blipFill>
+        <p:spPr>
+          <a:xfrm>
+            <a:off x="658368" y="2688336"/>
+            <a:ext cx="10874959" cy="1078992"/>
+          </a:xfrm>
+          <a:prstGeom prst="rect">
+            <a:avLst/>
+          </a:prstGeom>
+          <a:effectLst>
+            <a:outerShdw sx="100000" sy="100000" kx="0" ky="0" algn="bl" rotWithShape="0" blurRad="127000" dist="25400" dir="5400000">
+              <a:srgbClr val="2E1A4A">
+                <a:alpha val="12000"/>
+              </a:srgbClr>
+            </a:outerShdw>
+          </a:effectLst>
+        </p:spPr>
+      </p:pic>
+      <p:sp>
+        <p:nvSpPr>
+          <p:cNvPr id="6" name="Shape 2"/>
+          <p:cNvSpPr/>
+          <p:nvPr/>
+        </p:nvSpPr>
+        <p:spPr>
+          <a:xfrm>
+            <a:off x="658368" y="3986784"/>
             <a:ext cx="2029968" cy="1481328"/>
           </a:xfrm>
           <a:prstGeom prst="roundRect">
@@ -7419,13 +7450,13 @@
       </p:sp>
       <p:sp>
         <p:nvSpPr>
-          <p:cNvPr id="6" name="Shape 3"/>
-          <p:cNvSpPr/>
-          <p:nvPr/>
-        </p:nvSpPr>
-        <p:spPr>
-          <a:xfrm>
-            <a:off x="859536" y="4169664"/>
+          <p:cNvPr id="7" name="Shape 3"/>
+          <p:cNvSpPr/>
+          <p:nvPr/>
+        </p:nvSpPr>
+        <p:spPr>
+          <a:xfrm>
+            <a:off x="859536" y="4224528"/>
             <a:ext cx="182880" cy="182880"/>
           </a:xfrm>
           <a:prstGeom prst="ellipse">
@@ -7439,13 +7470,13 @@
       </p:sp>
       <p:sp>
         <p:nvSpPr>
-          <p:cNvPr id="7" name="Text 4"/>
-          <p:cNvSpPr/>
-          <p:nvPr/>
-        </p:nvSpPr>
-        <p:spPr>
-          <a:xfrm>
-            <a:off x="1115568" y="4096512"/>
+          <p:cNvPr id="8" name="Text 4"/>
+          <p:cNvSpPr/>
+          <p:nvPr/>
+        </p:nvSpPr>
+        <p:spPr>
+          <a:xfrm>
+            <a:off x="1115568" y="4151376"/>
             <a:ext cx="1463040" cy="329184"/>
           </a:xfrm>
           <a:prstGeom prst="rect">
@@ -7478,13 +7509,13 @@
       </p:sp>
       <p:sp>
         <p:nvSpPr>
-          <p:cNvPr id="8" name="Text 5"/>
-          <p:cNvSpPr/>
-          <p:nvPr/>
-        </p:nvSpPr>
-        <p:spPr>
-          <a:xfrm>
-            <a:off x="859536" y="4498848"/>
+          <p:cNvPr id="9" name="Text 5"/>
+          <p:cNvSpPr/>
+          <p:nvPr/>
+        </p:nvSpPr>
+        <p:spPr>
+          <a:xfrm>
+            <a:off x="859536" y="4553712"/>
             <a:ext cx="1664208" cy="786384"/>
           </a:xfrm>
           <a:prstGeom prst="rect">
@@ -7520,13 +7551,13 @@
       </p:sp>
       <p:sp>
         <p:nvSpPr>
-          <p:cNvPr id="9" name="Shape 6"/>
-          <p:cNvSpPr/>
-          <p:nvPr/>
-        </p:nvSpPr>
-        <p:spPr>
-          <a:xfrm>
-            <a:off x="2871216" y="3931920"/>
+          <p:cNvPr id="10" name="Shape 6"/>
+          <p:cNvSpPr/>
+          <p:nvPr/>
+        </p:nvSpPr>
+        <p:spPr>
+          <a:xfrm>
+            <a:off x="2871216" y="3986784"/>
             <a:ext cx="2029968" cy="1481328"/>
           </a:xfrm>
           <a:prstGeom prst="roundRect">
@@ -7547,13 +7578,13 @@
       </p:sp>
       <p:sp>
         <p:nvSpPr>
-          <p:cNvPr id="10" name="Shape 7"/>
-          <p:cNvSpPr/>
-          <p:nvPr/>
-        </p:nvSpPr>
-        <p:spPr>
-          <a:xfrm>
-            <a:off x="3072384" y="4169664"/>
+          <p:cNvPr id="11" name="Shape 7"/>
+          <p:cNvSpPr/>
+          <p:nvPr/>
+        </p:nvSpPr>
+        <p:spPr>
+          <a:xfrm>
+            <a:off x="3072384" y="4224528"/>
             <a:ext cx="182880" cy="182880"/>
           </a:xfrm>
           <a:prstGeom prst="ellipse">
@@ -7567,13 +7598,13 @@
       </p:sp>
       <p:sp>
         <p:nvSpPr>
-          <p:cNvPr id="11" name="Text 8"/>
-          <p:cNvSpPr/>
-          <p:nvPr/>
-        </p:nvSpPr>
-        <p:spPr>
-          <a:xfrm>
-            <a:off x="3328416" y="4096512"/>
+          <p:cNvPr id="12" name="Text 8"/>
+          <p:cNvSpPr/>
+          <p:nvPr/>
+        </p:nvSpPr>
+        <p:spPr>
+          <a:xfrm>
+            <a:off x="3328416" y="4151376"/>
             <a:ext cx="1463040" cy="329184"/>
           </a:xfrm>
           <a:prstGeom prst="rect">
@@ -7606,13 +7637,13 @@
       </p:sp>
       <p:sp>
         <p:nvSpPr>
-          <p:cNvPr id="12" name="Text 9"/>
-          <p:cNvSpPr/>
-          <p:nvPr/>
-        </p:nvSpPr>
-        <p:spPr>
-          <a:xfrm>
-            <a:off x="3072384" y="4498848"/>
+          <p:cNvPr id="13" name="Text 9"/>
+          <p:cNvSpPr/>
+          <p:nvPr/>
+        </p:nvSpPr>
+        <p:spPr>
+          <a:xfrm>
+            <a:off x="3072384" y="4553712"/>
             <a:ext cx="1664208" cy="786384"/>
           </a:xfrm>
           <a:prstGeom prst="rect">
@@ -7648,13 +7679,13 @@
       </p:sp>
       <p:sp>
         <p:nvSpPr>
-          <p:cNvPr id="13" name="Shape 10"/>
-          <p:cNvSpPr/>
-          <p:nvPr/>
-        </p:nvSpPr>
-        <p:spPr>
-          <a:xfrm>
-            <a:off x="5084064" y="3931920"/>
+          <p:cNvPr id="14" name="Shape 10"/>
+          <p:cNvSpPr/>
+          <p:nvPr/>
+        </p:nvSpPr>
+        <p:spPr>
+          <a:xfrm>
+            <a:off x="5084064" y="3986784"/>
             <a:ext cx="2029968" cy="1481328"/>
           </a:xfrm>
           <a:prstGeom prst="roundRect">
@@ -7675,13 +7706,13 @@
       </p:sp>
       <p:sp>
         <p:nvSpPr>
-          <p:cNvPr id="14" name="Shape 11"/>
-          <p:cNvSpPr/>
-          <p:nvPr/>
-        </p:nvSpPr>
-        <p:spPr>
-          <a:xfrm>
-            <a:off x="5285232" y="4169664"/>
+          <p:cNvPr id="15" name="Shape 11"/>
+          <p:cNvSpPr/>
+          <p:nvPr/>
+        </p:nvSpPr>
+        <p:spPr>
+          <a:xfrm>
+            <a:off x="5285232" y="4224528"/>
             <a:ext cx="182880" cy="182880"/>
           </a:xfrm>
           <a:prstGeom prst="ellipse">
@@ -7695,13 +7726,13 @@
       </p:sp>
       <p:sp>
         <p:nvSpPr>
-          <p:cNvPr id="15" name="Text 12"/>
-          <p:cNvSpPr/>
-          <p:nvPr/>
-        </p:nvSpPr>
-        <p:spPr>
-          <a:xfrm>
-            <a:off x="5541264" y="4096512"/>
+          <p:cNvPr id="16" name="Text 12"/>
+          <p:cNvSpPr/>
+          <p:nvPr/>
+        </p:nvSpPr>
+        <p:spPr>
+          <a:xfrm>
+            <a:off x="5541264" y="4151376"/>
             <a:ext cx="1463040" cy="329184"/>
           </a:xfrm>
           <a:prstGeom prst="rect">
@@ -7734,13 +7765,13 @@
       </p:sp>
       <p:sp>
         <p:nvSpPr>
-          <p:cNvPr id="16" name="Text 13"/>
-          <p:cNvSpPr/>
-          <p:nvPr/>
-        </p:nvSpPr>
-        <p:spPr>
-          <a:xfrm>
-            <a:off x="5285232" y="4498848"/>
+          <p:cNvPr id="17" name="Text 13"/>
+          <p:cNvSpPr/>
+          <p:nvPr/>
+        </p:nvSpPr>
+        <p:spPr>
+          <a:xfrm>
+            <a:off x="5285232" y="4553712"/>
             <a:ext cx="1664208" cy="786384"/>
           </a:xfrm>
           <a:prstGeom prst="rect">
@@ -7776,13 +7807,13 @@
       </p:sp>
       <p:sp>
         <p:nvSpPr>
-          <p:cNvPr id="17" name="Shape 14"/>
-          <p:cNvSpPr/>
-          <p:nvPr/>
-        </p:nvSpPr>
-        <p:spPr>
-          <a:xfrm>
-            <a:off x="7296912" y="3931920"/>
+          <p:cNvPr id="18" name="Shape 14"/>
+          <p:cNvSpPr/>
+          <p:nvPr/>
+        </p:nvSpPr>
+        <p:spPr>
+          <a:xfrm>
+            <a:off x="7296912" y="3986784"/>
             <a:ext cx="2029968" cy="1481328"/>
           </a:xfrm>
           <a:prstGeom prst="roundRect">
@@ -7803,13 +7834,13 @@
       </p:sp>
       <p:sp>
         <p:nvSpPr>
-          <p:cNvPr id="18" name="Shape 15"/>
-          <p:cNvSpPr/>
-          <p:nvPr/>
-        </p:nvSpPr>
-        <p:spPr>
-          <a:xfrm>
-            <a:off x="7498080" y="4169664"/>
+          <p:cNvPr id="19" name="Shape 15"/>
+          <p:cNvSpPr/>
+          <p:nvPr/>
+        </p:nvSpPr>
+        <p:spPr>
+          <a:xfrm>
+            <a:off x="7498080" y="4224528"/>
             <a:ext cx="182880" cy="182880"/>
           </a:xfrm>
           <a:prstGeom prst="ellipse">
@@ -7823,13 +7854,13 @@
       </p:sp>
       <p:sp>
         <p:nvSpPr>
-          <p:cNvPr id="19" name="Text 16"/>
-          <p:cNvSpPr/>
-          <p:nvPr/>
-        </p:nvSpPr>
-        <p:spPr>
-          <a:xfrm>
-            <a:off x="7754112" y="4096512"/>
+          <p:cNvPr id="20" name="Text 16"/>
+          <p:cNvSpPr/>
+          <p:nvPr/>
+        </p:nvSpPr>
+        <p:spPr>
+          <a:xfrm>
+            <a:off x="7754112" y="4151376"/>
             <a:ext cx="1463040" cy="329184"/>
           </a:xfrm>
           <a:prstGeom prst="rect">
@@ -7862,13 +7893,13 @@
       </p:sp>
       <p:sp>
         <p:nvSpPr>
-          <p:cNvPr id="20" name="Text 17"/>
-          <p:cNvSpPr/>
-          <p:nvPr/>
-        </p:nvSpPr>
-        <p:spPr>
-          <a:xfrm>
-            <a:off x="7498080" y="4498848"/>
+          <p:cNvPr id="21" name="Text 17"/>
+          <p:cNvSpPr/>
+          <p:nvPr/>
+        </p:nvSpPr>
+        <p:spPr>
+          <a:xfrm>
+            <a:off x="7498080" y="4553712"/>
             <a:ext cx="1664208" cy="786384"/>
           </a:xfrm>
           <a:prstGeom prst="rect">
@@ -7904,13 +7935,13 @@
       </p:sp>
       <p:sp>
         <p:nvSpPr>
-          <p:cNvPr id="21" name="Shape 18"/>
-          <p:cNvSpPr/>
-          <p:nvPr/>
-        </p:nvSpPr>
-        <p:spPr>
-          <a:xfrm>
-            <a:off x="9509760" y="3931920"/>
+          <p:cNvPr id="22" name="Shape 18"/>
+          <p:cNvSpPr/>
+          <p:nvPr/>
+        </p:nvSpPr>
+        <p:spPr>
+          <a:xfrm>
+            <a:off x="9509760" y="3986784"/>
             <a:ext cx="2029968" cy="1481328"/>
           </a:xfrm>
           <a:prstGeom prst="roundRect">
@@ -7931,13 +7962,13 @@
       </p:sp>
       <p:sp>
         <p:nvSpPr>
-          <p:cNvPr id="22" name="Shape 19"/>
-          <p:cNvSpPr/>
-          <p:nvPr/>
-        </p:nvSpPr>
-        <p:spPr>
-          <a:xfrm>
-            <a:off x="9710928" y="4169664"/>
+          <p:cNvPr id="23" name="Shape 19"/>
+          <p:cNvSpPr/>
+          <p:nvPr/>
+        </p:nvSpPr>
+        <p:spPr>
+          <a:xfrm>
+            <a:off x="9710928" y="4224528"/>
             <a:ext cx="182880" cy="182880"/>
           </a:xfrm>
           <a:prstGeom prst="ellipse">
@@ -7951,13 +7982,13 @@
       </p:sp>
       <p:sp>
         <p:nvSpPr>
-          <p:cNvPr id="23" name="Text 20"/>
-          <p:cNvSpPr/>
-          <p:nvPr/>
-        </p:nvSpPr>
-        <p:spPr>
-          <a:xfrm>
-            <a:off x="9966960" y="4096512"/>
+          <p:cNvPr id="24" name="Text 20"/>
+          <p:cNvSpPr/>
+          <p:nvPr/>
+        </p:nvSpPr>
+        <p:spPr>
+          <a:xfrm>
+            <a:off x="9966960" y="4151376"/>
             <a:ext cx="1463040" cy="329184"/>
           </a:xfrm>
           <a:prstGeom prst="rect">
@@ -7990,13 +8021,13 @@
       </p:sp>
       <p:sp>
         <p:nvSpPr>
-          <p:cNvPr id="24" name="Text 21"/>
-          <p:cNvSpPr/>
-          <p:nvPr/>
-        </p:nvSpPr>
-        <p:spPr>
-          <a:xfrm>
-            <a:off x="9710928" y="4498848"/>
+          <p:cNvPr id="25" name="Text 21"/>
+          <p:cNvSpPr/>
+          <p:nvPr/>
+        </p:nvSpPr>
+        <p:spPr>
+          <a:xfrm>
+            <a:off x="9710928" y="4553712"/>
             <a:ext cx="1664208" cy="786384"/>
           </a:xfrm>
           <a:prstGeom prst="rect">
@@ -8032,7 +8063,7 @@
       </p:sp>
       <p:sp>
         <p:nvSpPr>
-          <p:cNvPr id="25" name="Text 22"/>
+          <p:cNvPr id="26" name="Text 22"/>
           <p:cNvSpPr/>
           <p:nvPr/>
         </p:nvSpPr>

--- a/docs/お絵かきハロウィン-企画書.pptx
+++ b/docs/お絵かきハロウィン-企画書.pptx
@@ -2014,7 +2014,7 @@
                 <a:ea typeface="Meiryo" pitchFamily="34" charset="-122"/>
                 <a:cs typeface="Meiryo" pitchFamily="34" charset="-120"/>
               </a:rPr>
-              <a:t>子どもが塗ったおばけが、その場で</a:t>
+              <a:t>子どもが塗ったおばけが夜空を飛び、塗った</a:t>
             </a:r>
             <a:endParaRPr lang="en-US" sz="1900" dirty="0"/>
           </a:p>
@@ -2034,7 +2034,7 @@
                 <a:ea typeface="Meiryo" pitchFamily="34" charset="-122"/>
                 <a:cs typeface="Meiryo" pitchFamily="34" charset="-120"/>
               </a:rPr>
-              <a:t>大画面の夜空をふわふわ漂い出します。</a:t>
+              <a:t>フランケンが月あかりの丘を歩き出します。</a:t>
             </a:r>
             <a:endParaRPr lang="en-US" sz="1900" dirty="0"/>
           </a:p>
@@ -7089,7 +7089,7 @@
                 <a:ea typeface="Meiryo" pitchFamily="34" charset="-122"/>
                 <a:cs typeface="Meiryo" pitchFamily="34" charset="-120"/>
               </a:rPr>
-              <a:t>が広がっています。下には枯れ木・墓石・かぼちゃ畑があり、霧が流れています。その中を、子どもたちが塗ったおばけたちがふわふわ漂っています。</a:t>
+              <a:t>が広がっています。月を背にお城が建ち、ふもとには灯りのともった村と丘があります。その夜空を子どもたちが塗ったおばけ・こうもり・まじょが飛び、手前の丘ではフランケンが歩き、かぼちゃが転がります。</a:t>
             </a:r>
             <a:endParaRPr lang="en-US" sz="1450" dirty="0"/>
           </a:p>
@@ -7353,7 +7353,7 @@
                 <a:ea typeface="Meiryo" pitchFamily="34" charset="-122"/>
                 <a:cs typeface="Meiryo" pitchFamily="34" charset="-120"/>
               </a:rPr>
-              <a:t>5種とも夜空を「浮く」動きで揃えています</a:t>
+              <a:t>5種とも動きが違います。遠くからでも自分の絵が分かります</a:t>
             </a:r>
             <a:endParaRPr lang="en-US" sz="1400" dirty="0"/>
           </a:p>
@@ -7463,7 +7463,7 @@
             <a:avLst/>
           </a:prstGeom>
           <a:solidFill>
-            <a:srgbClr val="E8653F"/>
+            <a:srgbClr val="7A3FB5"/>
           </a:solidFill>
           <a:ln/>
         </p:spPr>
@@ -7501,7 +7501,7 @@
                 <a:ea typeface="Meiryo" pitchFamily="34" charset="-122"/>
                 <a:cs typeface="Meiryo" pitchFamily="34" charset="-120"/>
               </a:rPr>
-              <a:t>かぼちゃ</a:t>
+              <a:t>フランケンシュタイン</a:t>
             </a:r>
             <a:endParaRPr lang="en-US" sz="1250" dirty="0"/>
           </a:p>
@@ -7543,7 +7543,7 @@
                 <a:ea typeface="Meiryo" pitchFamily="34" charset="-122"/>
                 <a:cs typeface="Meiryo" pitchFamily="34" charset="-120"/>
               </a:rPr>
-              <a:t>夜空をゆっくり上下に漂います</a:t>
+              <a:t>月あかりの丘を横向きに歩きます。脚と腕を交互に振ります</a:t>
             </a:r>
             <a:endParaRPr lang="en-US" sz="1100" dirty="0"/>
           </a:p>
@@ -7591,7 +7591,7 @@
             <a:avLst/>
           </a:prstGeom>
           <a:solidFill>
-            <a:srgbClr val="9B7BD1"/>
+            <a:srgbClr val="E8653F"/>
           </a:solidFill>
           <a:ln/>
         </p:spPr>
@@ -7629,7 +7629,7 @@
                 <a:ea typeface="Meiryo" pitchFamily="34" charset="-122"/>
                 <a:cs typeface="Meiryo" pitchFamily="34" charset="-120"/>
               </a:rPr>
-              <a:t>おばけ</a:t>
+              <a:t>かぼちゃ</a:t>
             </a:r>
             <a:endParaRPr lang="en-US" sz="1250" dirty="0"/>
           </a:p>
@@ -7671,7 +7671,7 @@
                 <a:ea typeface="Meiryo" pitchFamily="34" charset="-122"/>
                 <a:cs typeface="Meiryo" pitchFamily="34" charset="-120"/>
               </a:rPr>
-              <a:t>ふわふわと、いちばんゆっくり漂います</a:t>
+              <a:t>丘をころころ転がります。5種でいちばんゆっくり</a:t>
             </a:r>
             <a:endParaRPr lang="en-US" sz="1100" dirty="0"/>
           </a:p>
@@ -7799,7 +7799,7 @@
                 <a:ea typeface="Meiryo" pitchFamily="34" charset="-122"/>
                 <a:cs typeface="Meiryo" pitchFamily="34" charset="-120"/>
               </a:rPr>
-              <a:t>翼を広げて、左右へすいっと進みます</a:t>
+              <a:t>夜空を細かくジグザグに、いちばん速く飛び回ります</a:t>
             </a:r>
             <a:endParaRPr lang="en-US" sz="1100" dirty="0"/>
           </a:p>
@@ -7927,7 +7927,7 @@
                 <a:ea typeface="Meiryo" pitchFamily="34" charset="-122"/>
                 <a:cs typeface="Meiryo" pitchFamily="34" charset="-120"/>
               </a:rPr>
-              <a:t>ほうきに乗って夜空を横切ります</a:t>
+              <a:t>ほうきで大きな弧を描き、顔の向いているほうへ横切ります</a:t>
             </a:r>
             <a:endParaRPr lang="en-US" sz="1100" dirty="0"/>
           </a:p>
@@ -7975,7 +7975,7 @@
             <a:avLst/>
           </a:prstGeom>
           <a:solidFill>
-            <a:srgbClr val="7A3FB5"/>
+            <a:srgbClr val="9B7BD1"/>
           </a:solidFill>
           <a:ln/>
         </p:spPr>
@@ -8013,7 +8013,7 @@
                 <a:ea typeface="Meiryo" pitchFamily="34" charset="-122"/>
                 <a:cs typeface="Meiryo" pitchFamily="34" charset="-120"/>
               </a:rPr>
-              <a:t>フランケンシュタイン</a:t>
+              <a:t>おばけ</a:t>
             </a:r>
             <a:endParaRPr lang="en-US" sz="1250" dirty="0"/>
           </a:p>
@@ -8055,7 +8055,7 @@
                 <a:ea typeface="Meiryo" pitchFamily="34" charset="-122"/>
                 <a:cs typeface="Meiryo" pitchFamily="34" charset="-120"/>
               </a:rPr>
-              <a:t>手を広げたまま、ゆったり漂います</a:t>
+              <a:t>ふらふらと不規則に、ゆっくり漂います</a:t>
             </a:r>
             <a:endParaRPr lang="en-US" sz="1100" dirty="0"/>
           </a:p>
@@ -8097,7 +8097,7 @@
                 <a:ea typeface="Meiryo" pitchFamily="34" charset="-122"/>
                 <a:cs typeface="Meiryo" pitchFamily="34" charset="-120"/>
               </a:rPr>
-              <a:t>歩く絵と浮く絵を混ぜると、見分けを1つ間違えただけで「地面を歩くはずのものが空に浮く」事故になります。ハロウィンは題材そのものが空に合うので、混ぜない設計にしました。</a:t>
+              <a:t>歩く絵と浮く絵を混ぜるのは、見分けを1つ間違えると「おばけが地面を歩く」になる危ないやり方です。それでも混ぜているのは、全部が同じように漂っていると5種類の違いが伝わらないからです。どちらの向きにも間違わないことは、自動の検査で毎回確かめています。</a:t>
             </a:r>
             <a:endParaRPr lang="en-US" sz="1200" dirty="0"/>
           </a:p>

--- a/docs/お絵かきハロウィン-企画書.pptx
+++ b/docs/お絵かきハロウィン-企画書.pptx
@@ -1856,7 +1856,7 @@
       </p:grpSpPr>
       <p:pic>
         <p:nvPicPr>
-          <p:cNvPr id="2" name="Image 0" descr="/home/user/PaintingsAquarium/docs/images/画面-ハロウィン.jpg">    </p:cNvPr>
+          <p:cNvPr id="2" name="Image 0" descr="/workspace/PaintingsAquarium/docs/images/画面-ハロウィン.jpg">    </p:cNvPr>
           <p:cNvPicPr>
             <a:picLocks noChangeAspect="1"/>
           </p:cNvPicPr>
@@ -5794,7 +5794,7 @@
       </p:sp>
       <p:pic>
         <p:nvPicPr>
-          <p:cNvPr id="17" name="Image 0" descr="/home/user/PaintingsAquarium/docs/images/いろいろな絵.jpg">    </p:cNvPr>
+          <p:cNvPr id="17" name="Image 0" descr="/workspace/PaintingsAquarium/docs/images/いろいろな絵.jpg">    </p:cNvPr>
           <p:cNvPicPr>
             <a:picLocks noChangeAspect="1"/>
           </p:cNvPicPr>
@@ -6504,7 +6504,7 @@
       </p:sp>
       <p:pic>
         <p:nvPicPr>
-          <p:cNvPr id="16" name="Image 0" descr="/home/user/PaintingsAquarium/docs/images/画面-ハロウィン.jpg">    </p:cNvPr>
+          <p:cNvPr id="16" name="Image 0" descr="/workspace/PaintingsAquarium/docs/images/画面-ハロウィン.jpg">    </p:cNvPr>
           <p:cNvPicPr>
             <a:picLocks noChangeAspect="1"/>
           </p:cNvPicPr>
@@ -6918,7 +6918,7 @@
       </p:sp>
       <p:pic>
         <p:nvPicPr>
-          <p:cNvPr id="4" name="Image 0" descr="/home/user/PaintingsAquarium/docs/images/変換前後.jpg">    </p:cNvPr>
+          <p:cNvPr id="4" name="Image 0" descr="/workspace/PaintingsAquarium/docs/images/変換前後.jpg">    </p:cNvPr>
           <p:cNvPicPr>
             <a:picLocks noChangeAspect="1"/>
           </p:cNvPicPr>
@@ -6991,7 +6991,7 @@
       </p:sp>
       <p:pic>
         <p:nvPicPr>
-          <p:cNvPr id="6" name="Image 1" descr="/home/user/PaintingsAquarium/docs/images/画面-ハロウィン.jpg">    </p:cNvPr>
+          <p:cNvPr id="6" name="Image 1" descr="/workspace/PaintingsAquarium/docs/images/画面-ハロウィン.jpg">    </p:cNvPr>
           <p:cNvPicPr>
             <a:picLocks noChangeAspect="1"/>
           </p:cNvPicPr>
@@ -7361,7 +7361,7 @@
       </p:sp>
       <p:pic>
         <p:nvPicPr>
-          <p:cNvPr id="4" name="Image 0" descr="/home/user/PaintingsAquarium/docs/images/ハロウィン台紙5種.jpg">    </p:cNvPr>
+          <p:cNvPr id="4" name="Image 0" descr="/workspace/PaintingsAquarium/docs/images/ハロウィン台紙5種.jpg">    </p:cNvPr>
           <p:cNvPicPr>
             <a:picLocks noChangeAspect="1"/>
           </p:cNvPicPr>
@@ -7392,7 +7392,7 @@
       </p:pic>
       <p:pic>
         <p:nvPicPr>
-          <p:cNvPr id="5" name="Image 1" descr="/home/user/PaintingsAquarium/docs/images/ハロウィン-塗った例.jpg">    </p:cNvPr>
+          <p:cNvPr id="5" name="Image 1" descr="/workspace/PaintingsAquarium/docs/images/ハロウィン-塗った例.jpg">    </p:cNvPr>
           <p:cNvPicPr>
             <a:picLocks noChangeAspect="1"/>
           </p:cNvPicPr>
@@ -7543,7 +7543,7 @@
                 <a:ea typeface="Meiryo" pitchFamily="34" charset="-122"/>
                 <a:cs typeface="Meiryo" pitchFamily="34" charset="-120"/>
               </a:rPr>
-              <a:t>月あかりの丘を横向きに歩きます。脚と腕を交互に振ります</a:t>
+              <a:t>月あかりの丘を横向きに歩きます。脚と腕を控えめに交互に振ります</a:t>
             </a:r>
             <a:endParaRPr lang="en-US" sz="1100" dirty="0"/>
           </a:p>
@@ -8055,7 +8055,7 @@
                 <a:ea typeface="Meiryo" pitchFamily="34" charset="-122"/>
                 <a:cs typeface="Meiryo" pitchFamily="34" charset="-120"/>
               </a:rPr>
-              <a:t>ふらふらと不規則に、ゆっくり漂います</a:t>
+              <a:t>大きさを控えめに、夜空をゆっくり漂います</a:t>
             </a:r>
             <a:endParaRPr lang="en-US" sz="1100" dirty="0"/>
           </a:p>

--- a/docs/お絵かきハロウィン-企画書.pptx
+++ b/docs/お絵かきハロウィン-企画書.pptx
@@ -7089,7 +7089,7 @@
                 <a:ea typeface="Meiryo" pitchFamily="34" charset="-122"/>
                 <a:cs typeface="Meiryo" pitchFamily="34" charset="-120"/>
               </a:rPr>
-              <a:t>が広がっています。月を背にお城が建ち、ふもとには灯りのともった村と丘があります。その夜空を子どもたちが塗ったおばけ・こうもり・まじょが飛び、手前の丘ではフランケンが歩き、かぼちゃが転がります。</a:t>
+              <a:t>が広がっています。月を背にお城が建ち、ふもとには灯りのともった村と丘があります。その夜空を子どもたちが塗ったおばけ・こうもり・まじょが飛び、手前の丘ではフランケンが歩き、かぼちゃが跳ねります。</a:t>
             </a:r>
             <a:endParaRPr lang="en-US" sz="1450" dirty="0"/>
           </a:p>
@@ -7671,7 +7671,7 @@
                 <a:ea typeface="Meiryo" pitchFamily="34" charset="-122"/>
                 <a:cs typeface="Meiryo" pitchFamily="34" charset="-120"/>
               </a:rPr>
-              <a:t>丘をころころ転がります。5種でいちばんゆっくり</a:t>
+              <a:t>丘をぽんぽんと跳ねて進みます。5種でいちばんゆっくり</a:t>
             </a:r>
             <a:endParaRPr lang="en-US" sz="1100" dirty="0"/>
           </a:p>

--- a/docs/お絵かきハロウィン-企画書.pptx
+++ b/docs/お絵かきハロウィン-企画書.pptx
@@ -7671,7 +7671,7 @@
                 <a:ea typeface="Meiryo" pitchFamily="34" charset="-122"/>
                 <a:cs typeface="Meiryo" pitchFamily="34" charset="-120"/>
               </a:rPr>
-              <a:t>丘をぽんぽんと跳ねて進みます。5種でいちばんゆっくり</a:t>
+              <a:t>丘を体の高さの半分ほどぽんと跳び、着地して進みます。5種でいちばんゆっくり</a:t>
             </a:r>
             <a:endParaRPr lang="en-US" sz="1100" dirty="0"/>
           </a:p>

--- a/docs/お絵かきハロウィン-企画書.pptx
+++ b/docs/お絵かきハロウィン-企画書.pptx
@@ -7671,7 +7671,7 @@
                 <a:ea typeface="Meiryo" pitchFamily="34" charset="-122"/>
                 <a:cs typeface="Meiryo" pitchFamily="34" charset="-120"/>
               </a:rPr>
-              <a:t>丘を体の高さの半分ほどぽんと跳び、着地して進みます。5種でいちばんゆっくり</a:t>
+              <a:t>丘を斜め上へ跳び、横へ進んで着地します。着地すると少し休む</a:t>
             </a:r>
             <a:endParaRPr lang="en-US" sz="1100" dirty="0"/>
           </a:p>

--- a/docs/お絵かきハロウィン-企画書.pptx
+++ b/docs/お絵かきハロウィン-企画書.pptx
@@ -8055,7 +8055,7 @@
                 <a:ea typeface="Meiryo" pitchFamily="34" charset="-122"/>
                 <a:cs typeface="Meiryo" pitchFamily="34" charset="-120"/>
               </a:rPr>
-              <a:t>大きさを控えめに、夜空をゆっくり漂います</a:t>
+              <a:t>他の絵とのバランスを保ち、夜空をゆっくり漂います</a:t>
             </a:r>
             <a:endParaRPr lang="en-US" sz="1100" dirty="0"/>
           </a:p>
